--- a/.lessons/21 Fundamental CRUD/3 Templating And Mark up (part -2)/1.pptx
+++ b/.lessons/21 Fundamental CRUD/3 Templating And Mark up (part -2)/1.pptx
@@ -6,9 +6,15 @@
   </p:sldMasterIdLst>
   <p:sldIdLst>
     <p:sldId id="401" r:id="rId2"/>
-    <p:sldId id="402" r:id="rId3"/>
-    <p:sldId id="403" r:id="rId4"/>
+    <p:sldId id="403" r:id="rId3"/>
+    <p:sldId id="402" r:id="rId4"/>
     <p:sldId id="400" r:id="rId5"/>
+    <p:sldId id="404" r:id="rId6"/>
+    <p:sldId id="405" r:id="rId7"/>
+    <p:sldId id="407" r:id="rId8"/>
+    <p:sldId id="408" r:id="rId9"/>
+    <p:sldId id="409" r:id="rId10"/>
+    <p:sldId id="406" r:id="rId11"/>
   </p:sldIdLst>
   <p:sldSz cx="12192000" cy="6858000"/>
   <p:notesSz cx="6858000" cy="9144000"/>
@@ -262,7 +268,7 @@
           <a:p>
             <a:fld id="{3E102D2E-813C-461C-9963-687A650C48C0}" type="datetimeFigureOut">
               <a:rPr lang="en-US" smtClean="0"/>
-              <a:t>4/26/2025</a:t>
+              <a:t>5/16/2025</a:t>
             </a:fld>
             <a:endParaRPr lang="en-US"/>
           </a:p>
@@ -460,7 +466,7 @@
           <a:p>
             <a:fld id="{3E102D2E-813C-461C-9963-687A650C48C0}" type="datetimeFigureOut">
               <a:rPr lang="en-US" smtClean="0"/>
-              <a:t>4/26/2025</a:t>
+              <a:t>5/16/2025</a:t>
             </a:fld>
             <a:endParaRPr lang="en-US"/>
           </a:p>
@@ -668,7 +674,7 @@
           <a:p>
             <a:fld id="{3E102D2E-813C-461C-9963-687A650C48C0}" type="datetimeFigureOut">
               <a:rPr lang="en-US" smtClean="0"/>
-              <a:t>4/26/2025</a:t>
+              <a:t>5/16/2025</a:t>
             </a:fld>
             <a:endParaRPr lang="en-US"/>
           </a:p>
@@ -866,7 +872,7 @@
           <a:p>
             <a:fld id="{3E102D2E-813C-461C-9963-687A650C48C0}" type="datetimeFigureOut">
               <a:rPr lang="en-US" smtClean="0"/>
-              <a:t>4/26/2025</a:t>
+              <a:t>5/16/2025</a:t>
             </a:fld>
             <a:endParaRPr lang="en-US"/>
           </a:p>
@@ -1141,7 +1147,7 @@
           <a:p>
             <a:fld id="{3E102D2E-813C-461C-9963-687A650C48C0}" type="datetimeFigureOut">
               <a:rPr lang="en-US" smtClean="0"/>
-              <a:t>4/26/2025</a:t>
+              <a:t>5/16/2025</a:t>
             </a:fld>
             <a:endParaRPr lang="en-US"/>
           </a:p>
@@ -1406,7 +1412,7 @@
           <a:p>
             <a:fld id="{3E102D2E-813C-461C-9963-687A650C48C0}" type="datetimeFigureOut">
               <a:rPr lang="en-US" smtClean="0"/>
-              <a:t>4/26/2025</a:t>
+              <a:t>5/16/2025</a:t>
             </a:fld>
             <a:endParaRPr lang="en-US"/>
           </a:p>
@@ -1818,7 +1824,7 @@
           <a:p>
             <a:fld id="{3E102D2E-813C-461C-9963-687A650C48C0}" type="datetimeFigureOut">
               <a:rPr lang="en-US" smtClean="0"/>
-              <a:t>4/26/2025</a:t>
+              <a:t>5/16/2025</a:t>
             </a:fld>
             <a:endParaRPr lang="en-US"/>
           </a:p>
@@ -1959,7 +1965,7 @@
           <a:p>
             <a:fld id="{3E102D2E-813C-461C-9963-687A650C48C0}" type="datetimeFigureOut">
               <a:rPr lang="en-US" smtClean="0"/>
-              <a:t>4/26/2025</a:t>
+              <a:t>5/16/2025</a:t>
             </a:fld>
             <a:endParaRPr lang="en-US"/>
           </a:p>
@@ -2072,7 +2078,7 @@
           <a:p>
             <a:fld id="{3E102D2E-813C-461C-9963-687A650C48C0}" type="datetimeFigureOut">
               <a:rPr lang="en-US" smtClean="0"/>
-              <a:t>4/26/2025</a:t>
+              <a:t>5/16/2025</a:t>
             </a:fld>
             <a:endParaRPr lang="en-US"/>
           </a:p>
@@ -2383,7 +2389,7 @@
           <a:p>
             <a:fld id="{3E102D2E-813C-461C-9963-687A650C48C0}" type="datetimeFigureOut">
               <a:rPr lang="en-US" smtClean="0"/>
-              <a:t>4/26/2025</a:t>
+              <a:t>5/16/2025</a:t>
             </a:fld>
             <a:endParaRPr lang="en-US"/>
           </a:p>
@@ -2671,7 +2677,7 @@
           <a:p>
             <a:fld id="{3E102D2E-813C-461C-9963-687A650C48C0}" type="datetimeFigureOut">
               <a:rPr lang="en-US" smtClean="0"/>
-              <a:t>4/26/2025</a:t>
+              <a:t>5/16/2025</a:t>
             </a:fld>
             <a:endParaRPr lang="en-US"/>
           </a:p>
@@ -2912,7 +2918,7 @@
           <a:p>
             <a:fld id="{3E102D2E-813C-461C-9963-687A650C48C0}" type="datetimeFigureOut">
               <a:rPr lang="en-US" smtClean="0"/>
-              <a:t>4/26/2025</a:t>
+              <a:t>5/16/2025</a:t>
             </a:fld>
             <a:endParaRPr lang="en-US"/>
           </a:p>
@@ -3350,7 +3356,7 @@
         <p:spPr>
           <a:xfrm>
             <a:off x="217714" y="255046"/>
-            <a:ext cx="11756571" cy="355354"/>
+            <a:ext cx="9459335" cy="3356175"/>
           </a:xfrm>
           <a:prstGeom prst="rect">
             <a:avLst/>
@@ -3370,7 +3376,57 @@
               <a:buNone/>
             </a:pPr>
             <a:r>
-              <a:rPr kumimoji="0" lang="en-US" altLang="en-US" sz="1300" b="0" i="0" u="none" strike="noStrike" cap="none" normalizeH="0" baseline="0">
+              <a:rPr lang="az-Latn-AZ" altLang="en-US" sz="1300">
+                <a:latin typeface="Arial" panose="020B0604020202020204" pitchFamily="34" charset="0"/>
+              </a:rPr>
+              <a:t>Templating dərsimizin dəvamında </a:t>
+            </a:r>
+            <a:r>
+              <a:rPr lang="az-Latn-AZ" altLang="en-US" sz="1300" b="1">
+                <a:latin typeface="Arial" panose="020B0604020202020204" pitchFamily="34" charset="0"/>
+              </a:rPr>
+              <a:t>CREATE</a:t>
+            </a:r>
+            <a:r>
+              <a:rPr lang="az-Latn-AZ" altLang="en-US" sz="1300">
+                <a:latin typeface="Arial" panose="020B0604020202020204" pitchFamily="34" charset="0"/>
+              </a:rPr>
+              <a:t> səhifəmizi yaradacağıq. Addımlar aşağı şəkildəki kimi olacaq. </a:t>
+            </a:r>
+          </a:p>
+          <a:p>
+            <a:pPr>
+              <a:lnSpc>
+                <a:spcPct val="150000"/>
+              </a:lnSpc>
+              <a:buNone/>
+            </a:pPr>
+            <a:endParaRPr lang="az-Latn-AZ" altLang="en-US" sz="1300">
+              <a:latin typeface="Arial" panose="020B0604020202020204" pitchFamily="34" charset="0"/>
+            </a:endParaRPr>
+          </a:p>
+          <a:p>
+            <a:pPr marL="285750" indent="-285750">
+              <a:lnSpc>
+                <a:spcPct val="150000"/>
+              </a:lnSpc>
+              <a:buFont typeface="Arial" panose="020B0604020202020204" pitchFamily="34" charset="0"/>
+              <a:buChar char="•"/>
+            </a:pPr>
+            <a:r>
+              <a:rPr lang="az-Latn-AZ" altLang="en-US" sz="1300">
+                <a:latin typeface="Arial" panose="020B0604020202020204" pitchFamily="34" charset="0"/>
+              </a:rPr>
+              <a:t>Eyni </a:t>
+            </a:r>
+            <a:r>
+              <a:rPr lang="az-Latn-AZ" altLang="en-US" sz="1300" b="1">
+                <a:latin typeface="Arial" panose="020B0604020202020204" pitchFamily="34" charset="0"/>
+              </a:rPr>
+              <a:t>index.blade.php </a:t>
+            </a:r>
+            <a:r>
+              <a:rPr kumimoji="0" lang="az-Latn-AZ" altLang="en-US" sz="1300" b="0" i="0" u="none" strike="noStrike" cap="none" normalizeH="0" baseline="0">
                 <a:ln>
                   <a:noFill/>
                 </a:ln>
@@ -3380,11 +3436,380 @@
                 <a:effectLst/>
                 <a:latin typeface="Arial" panose="020B0604020202020204" pitchFamily="34" charset="0"/>
               </a:rPr>
-              <a:t>.</a:t>
-            </a:r>
-          </a:p>
-        </p:txBody>
-      </p:sp>
+              <a:t>s</a:t>
+            </a:r>
+            <a:r>
+              <a:rPr lang="az-Latn-AZ" altLang="en-US" sz="1300">
+                <a:latin typeface="Arial" panose="020B0604020202020204" pitchFamily="34" charset="0"/>
+              </a:rPr>
+              <a:t>əhifəsini copy past edirik və </a:t>
+            </a:r>
+            <a:r>
+              <a:rPr lang="az-Latn-AZ" altLang="en-US" sz="1300" b="1">
+                <a:latin typeface="Arial" panose="020B0604020202020204" pitchFamily="34" charset="0"/>
+              </a:rPr>
+              <a:t>table</a:t>
+            </a:r>
+            <a:r>
+              <a:rPr lang="az-Latn-AZ" altLang="en-US" sz="1300">
+                <a:latin typeface="Arial" panose="020B0604020202020204" pitchFamily="34" charset="0"/>
+              </a:rPr>
+              <a:t> tag-lərini silirik. Onun yerinə sonra </a:t>
+            </a:r>
+            <a:r>
+              <a:rPr lang="az-Latn-AZ" altLang="en-US" sz="1300" b="1">
+                <a:latin typeface="Arial" panose="020B0604020202020204" pitchFamily="34" charset="0"/>
+              </a:rPr>
+              <a:t>form</a:t>
+            </a:r>
+            <a:r>
+              <a:rPr lang="az-Latn-AZ" altLang="en-US" sz="1300">
+                <a:latin typeface="Arial" panose="020B0604020202020204" pitchFamily="34" charset="0"/>
+              </a:rPr>
+              <a:t> taglərini yazacağıq. </a:t>
+            </a:r>
+          </a:p>
+          <a:p>
+            <a:pPr marL="285750" indent="-285750">
+              <a:lnSpc>
+                <a:spcPct val="150000"/>
+              </a:lnSpc>
+              <a:buFont typeface="Arial" panose="020B0604020202020204" pitchFamily="34" charset="0"/>
+              <a:buChar char="•"/>
+            </a:pPr>
+            <a:endParaRPr lang="az-Latn-AZ" altLang="en-US" sz="1300">
+              <a:latin typeface="Arial" panose="020B0604020202020204" pitchFamily="34" charset="0"/>
+            </a:endParaRPr>
+          </a:p>
+          <a:p>
+            <a:pPr marL="285750" indent="-285750">
+              <a:lnSpc>
+                <a:spcPct val="150000"/>
+              </a:lnSpc>
+              <a:buFont typeface="Arial" panose="020B0604020202020204" pitchFamily="34" charset="0"/>
+              <a:buChar char="•"/>
+            </a:pPr>
+            <a:r>
+              <a:rPr kumimoji="0" lang="az-Latn-AZ" altLang="en-US" sz="1300" b="0" i="0" u="none" strike="noStrike" cap="none" normalizeH="0" baseline="0">
+                <a:ln>
+                  <a:noFill/>
+                </a:ln>
+                <a:solidFill>
+                  <a:schemeClr val="tx1"/>
+                </a:solidFill>
+                <a:effectLst/>
+                <a:latin typeface="Arial" panose="020B0604020202020204" pitchFamily="34" charset="0"/>
+              </a:rPr>
+              <a:t>Sonra controllerdə create() metoduna bu create səhifəsini return etsin deyirik.</a:t>
+            </a:r>
+          </a:p>
+          <a:p>
+            <a:pPr marL="285750" indent="-285750">
+              <a:lnSpc>
+                <a:spcPct val="150000"/>
+              </a:lnSpc>
+              <a:buFont typeface="Arial" panose="020B0604020202020204" pitchFamily="34" charset="0"/>
+              <a:buChar char="•"/>
+            </a:pPr>
+            <a:endParaRPr kumimoji="0" lang="az-Latn-AZ" altLang="en-US" sz="1300" b="0" i="0" u="none" strike="noStrike" cap="none" normalizeH="0" baseline="0">
+              <a:ln>
+                <a:noFill/>
+              </a:ln>
+              <a:solidFill>
+                <a:schemeClr val="tx1"/>
+              </a:solidFill>
+              <a:effectLst/>
+              <a:latin typeface="Arial" panose="020B0604020202020204" pitchFamily="34" charset="0"/>
+            </a:endParaRPr>
+          </a:p>
+          <a:p>
+            <a:pPr marL="285750" indent="-285750">
+              <a:lnSpc>
+                <a:spcPct val="150000"/>
+              </a:lnSpc>
+              <a:buFont typeface="Arial" panose="020B0604020202020204" pitchFamily="34" charset="0"/>
+              <a:buChar char="•"/>
+            </a:pPr>
+            <a:r>
+              <a:rPr lang="az-Latn-AZ" altLang="en-US" sz="1300">
+                <a:latin typeface="Arial" panose="020B0604020202020204" pitchFamily="34" charset="0"/>
+              </a:rPr>
+              <a:t>Daha sonra isə, </a:t>
+            </a:r>
+            <a:r>
+              <a:rPr lang="az-Latn-AZ" altLang="en-US" sz="1300" b="1">
+                <a:latin typeface="Arial" panose="020B0604020202020204" pitchFamily="34" charset="0"/>
+              </a:rPr>
+              <a:t>index.blade.php </a:t>
+            </a:r>
+            <a:r>
+              <a:rPr lang="az-Latn-AZ" altLang="en-US" sz="1300">
+                <a:latin typeface="Arial" panose="020B0604020202020204" pitchFamily="34" charset="0"/>
+              </a:rPr>
+              <a:t>səhifəsindəki </a:t>
+            </a:r>
+            <a:r>
+              <a:rPr lang="en-US" altLang="en-US" sz="1300" b="1">
+                <a:latin typeface="Arial" panose="020B0604020202020204" pitchFamily="34" charset="0"/>
+              </a:rPr>
+              <a:t>&lt;a&gt; </a:t>
+            </a:r>
+            <a:r>
+              <a:rPr lang="az-Latn-AZ" altLang="en-US" sz="1300">
+                <a:latin typeface="Arial" panose="020B0604020202020204" pitchFamily="34" charset="0"/>
+              </a:rPr>
+              <a:t>taginə </a:t>
+            </a:r>
+            <a:r>
+              <a:rPr lang="az-Latn-AZ" altLang="en-US" sz="1300" b="1">
+                <a:latin typeface="Arial" panose="020B0604020202020204" pitchFamily="34" charset="0"/>
+              </a:rPr>
+              <a:t>route</a:t>
+            </a:r>
+            <a:r>
+              <a:rPr lang="az-Latn-AZ" altLang="en-US" sz="1300">
+                <a:latin typeface="Arial" panose="020B0604020202020204" pitchFamily="34" charset="0"/>
+              </a:rPr>
+              <a:t> təyin edirik ki, `</a:t>
+            </a:r>
+            <a:r>
+              <a:rPr lang="az-Latn-AZ" altLang="en-US" sz="1300" b="1">
+                <a:latin typeface="Arial" panose="020B0604020202020204" pitchFamily="34" charset="0"/>
+              </a:rPr>
+              <a:t>Create</a:t>
+            </a:r>
+            <a:r>
+              <a:rPr lang="az-Latn-AZ" altLang="en-US" sz="1300">
+                <a:latin typeface="Arial" panose="020B0604020202020204" pitchFamily="34" charset="0"/>
+              </a:rPr>
+              <a:t>` yazısını kliklədikdə </a:t>
+            </a:r>
+            <a:r>
+              <a:rPr lang="az-Latn-AZ" altLang="en-US" sz="1300" b="1">
+                <a:latin typeface="Arial" panose="020B0604020202020204" pitchFamily="34" charset="0"/>
+              </a:rPr>
+              <a:t>create.blade.php </a:t>
+            </a:r>
+            <a:r>
+              <a:rPr lang="az-Latn-AZ" altLang="en-US" sz="1300">
+                <a:latin typeface="Arial" panose="020B0604020202020204" pitchFamily="34" charset="0"/>
+              </a:rPr>
+              <a:t>səhifəsinə yönləndirilək. </a:t>
+            </a:r>
+            <a:r>
+              <a:rPr lang="az-Latn-AZ" altLang="en-US" sz="1300" b="1">
+                <a:latin typeface="Arial" panose="020B0604020202020204" pitchFamily="34" charset="0"/>
+              </a:rPr>
+              <a:t>route(</a:t>
+            </a:r>
+            <a:r>
+              <a:rPr lang="en-US" altLang="en-US" sz="1300" b="1">
+                <a:latin typeface="Arial" panose="020B0604020202020204" pitchFamily="34" charset="0"/>
+              </a:rPr>
+              <a:t>‘posts.create’</a:t>
+            </a:r>
+            <a:r>
+              <a:rPr lang="az-Latn-AZ" altLang="en-US" sz="1300" b="1">
+                <a:latin typeface="Arial" panose="020B0604020202020204" pitchFamily="34" charset="0"/>
+              </a:rPr>
+              <a:t>) </a:t>
+            </a:r>
+            <a:r>
+              <a:rPr lang="az-Latn-AZ" altLang="en-US" sz="1300">
+                <a:latin typeface="Arial" panose="020B0604020202020204" pitchFamily="34" charset="0"/>
+              </a:rPr>
+              <a:t>metodunda yazdığımız </a:t>
+            </a:r>
+            <a:r>
+              <a:rPr lang="az-Latn-AZ" altLang="en-US" sz="1300" b="1">
+                <a:solidFill>
+                  <a:srgbClr val="FF0000"/>
+                </a:solidFill>
+                <a:latin typeface="Arial" panose="020B0604020202020204" pitchFamily="34" charset="0"/>
+              </a:rPr>
+              <a:t>posts.create </a:t>
+            </a:r>
+            <a:r>
+              <a:rPr lang="az-Latn-AZ" altLang="en-US" sz="1300">
+                <a:latin typeface="Arial" panose="020B0604020202020204" pitchFamily="34" charset="0"/>
+              </a:rPr>
+              <a:t>yazısını terminalda </a:t>
+            </a:r>
+            <a:r>
+              <a:rPr lang="az-Latn-AZ" altLang="en-US" sz="1300" b="1">
+                <a:solidFill>
+                  <a:schemeClr val="accent2"/>
+                </a:solidFill>
+                <a:latin typeface="Arial" panose="020B0604020202020204" pitchFamily="34" charset="0"/>
+              </a:rPr>
+              <a:t>php artisan route:list </a:t>
+            </a:r>
+            <a:r>
+              <a:rPr lang="az-Latn-AZ" altLang="en-US" sz="1300">
+                <a:latin typeface="Arial" panose="020B0604020202020204" pitchFamily="34" charset="0"/>
+              </a:rPr>
+              <a:t>əmrini yazaraq əldə etdiyimiz siyahıdan götürürük. </a:t>
+            </a:r>
+            <a:endParaRPr kumimoji="0" lang="az-Latn-AZ" altLang="en-US" sz="1300" b="0" i="0" u="none" strike="noStrike" cap="none" normalizeH="0" baseline="0">
+              <a:ln>
+                <a:noFill/>
+              </a:ln>
+              <a:solidFill>
+                <a:schemeClr val="tx1"/>
+              </a:solidFill>
+              <a:effectLst/>
+              <a:latin typeface="Arial" panose="020B0604020202020204" pitchFamily="34" charset="0"/>
+            </a:endParaRPr>
+          </a:p>
+          <a:p>
+            <a:pPr>
+              <a:lnSpc>
+                <a:spcPct val="150000"/>
+              </a:lnSpc>
+              <a:buNone/>
+            </a:pPr>
+            <a:endParaRPr lang="az-Latn-AZ" altLang="en-US" sz="1300">
+              <a:latin typeface="Arial" panose="020B0604020202020204" pitchFamily="34" charset="0"/>
+            </a:endParaRPr>
+          </a:p>
+          <a:p>
+            <a:pPr>
+              <a:lnSpc>
+                <a:spcPct val="150000"/>
+              </a:lnSpc>
+              <a:buNone/>
+            </a:pPr>
+            <a:endParaRPr kumimoji="0" lang="en-US" altLang="en-US" sz="1300" b="0" i="0" u="none" strike="noStrike" cap="none" normalizeH="0" baseline="0">
+              <a:ln>
+                <a:noFill/>
+              </a:ln>
+              <a:solidFill>
+                <a:schemeClr val="tx1"/>
+              </a:solidFill>
+              <a:effectLst/>
+              <a:latin typeface="Arial" panose="020B0604020202020204" pitchFamily="34" charset="0"/>
+            </a:endParaRPr>
+          </a:p>
+        </p:txBody>
+      </p:sp>
+      <p:pic>
+        <p:nvPicPr>
+          <p:cNvPr id="4" name="Picture 3">
+            <a:extLst>
+              <a:ext uri="{FF2B5EF4-FFF2-40B4-BE49-F238E27FC236}">
+                <a16:creationId xmlns:a16="http://schemas.microsoft.com/office/drawing/2014/main" id="{CED8E915-F784-90DF-8A65-BEEFDD8D344A}"/>
+              </a:ext>
+            </a:extLst>
+          </p:cNvPr>
+          <p:cNvPicPr>
+            <a:picLocks noChangeAspect="1"/>
+          </p:cNvPicPr>
+          <p:nvPr/>
+        </p:nvPicPr>
+        <p:blipFill>
+          <a:blip r:embed="rId2"/>
+          <a:stretch>
+            <a:fillRect/>
+          </a:stretch>
+        </p:blipFill>
+        <p:spPr>
+          <a:xfrm>
+            <a:off x="10131939" y="0"/>
+            <a:ext cx="2054410" cy="1159497"/>
+          </a:xfrm>
+          <a:prstGeom prst="rect">
+            <a:avLst/>
+          </a:prstGeom>
+          <a:ln w="38100" cap="sq">
+            <a:solidFill>
+              <a:srgbClr val="000000"/>
+            </a:solidFill>
+            <a:prstDash val="solid"/>
+            <a:miter lim="800000"/>
+          </a:ln>
+          <a:effectLst>
+            <a:outerShdw blurRad="50800" dist="38100" dir="2700000" algn="tl" rotWithShape="0">
+              <a:srgbClr val="000000">
+                <a:alpha val="43000"/>
+              </a:srgbClr>
+            </a:outerShdw>
+          </a:effectLst>
+        </p:spPr>
+      </p:pic>
+      <p:pic>
+        <p:nvPicPr>
+          <p:cNvPr id="6" name="Picture 5">
+            <a:extLst>
+              <a:ext uri="{FF2B5EF4-FFF2-40B4-BE49-F238E27FC236}">
+                <a16:creationId xmlns:a16="http://schemas.microsoft.com/office/drawing/2014/main" id="{AC1F52FB-141B-14E6-DAEB-F383E23FFC6C}"/>
+              </a:ext>
+            </a:extLst>
+          </p:cNvPr>
+          <p:cNvPicPr>
+            <a:picLocks noChangeAspect="1"/>
+          </p:cNvPicPr>
+          <p:nvPr/>
+        </p:nvPicPr>
+        <p:blipFill>
+          <a:blip r:embed="rId3"/>
+          <a:stretch>
+            <a:fillRect/>
+          </a:stretch>
+        </p:blipFill>
+        <p:spPr>
+          <a:xfrm>
+            <a:off x="0" y="3199107"/>
+            <a:ext cx="12192000" cy="3658893"/>
+          </a:xfrm>
+          <a:prstGeom prst="rect">
+            <a:avLst/>
+          </a:prstGeom>
+        </p:spPr>
+      </p:pic>
+      <p:pic>
+        <p:nvPicPr>
+          <p:cNvPr id="8" name="Picture 7">
+            <a:extLst>
+              <a:ext uri="{FF2B5EF4-FFF2-40B4-BE49-F238E27FC236}">
+                <a16:creationId xmlns:a16="http://schemas.microsoft.com/office/drawing/2014/main" id="{6B9D9720-EE2D-A269-B8C3-0845EF0C6FE9}"/>
+              </a:ext>
+            </a:extLst>
+          </p:cNvPr>
+          <p:cNvPicPr>
+            <a:picLocks noChangeAspect="1"/>
+          </p:cNvPicPr>
+          <p:nvPr/>
+        </p:nvPicPr>
+        <p:blipFill>
+          <a:blip r:embed="rId4"/>
+          <a:stretch>
+            <a:fillRect/>
+          </a:stretch>
+        </p:blipFill>
+        <p:spPr>
+          <a:xfrm>
+            <a:off x="10143241" y="1478716"/>
+            <a:ext cx="2048759" cy="1312732"/>
+          </a:xfrm>
+          <a:prstGeom prst="rect">
+            <a:avLst/>
+          </a:prstGeom>
+          <a:ln w="38100" cap="sq">
+            <a:solidFill>
+              <a:srgbClr val="000000"/>
+            </a:solidFill>
+            <a:prstDash val="solid"/>
+            <a:miter lim="800000"/>
+          </a:ln>
+          <a:effectLst>
+            <a:outerShdw blurRad="50800" dist="38100" dir="2700000" algn="tl" rotWithShape="0">
+              <a:srgbClr val="000000">
+                <a:alpha val="43000"/>
+              </a:srgbClr>
+            </a:outerShdw>
+          </a:effectLst>
+        </p:spPr>
+      </p:pic>
     </p:spTree>
     <p:extLst>
       <p:ext uri="{BB962C8B-B14F-4D97-AF65-F5344CB8AC3E}">
@@ -3398,7 +3823,221 @@
 </p:sld>
 </file>
 
+<file path=ppt/slides/slide10.xml><?xml version="1.0" encoding="utf-8"?>
+<p:sld xmlns:a="http://schemas.openxmlformats.org/drawingml/2006/main" xmlns:r="http://schemas.openxmlformats.org/officeDocument/2006/relationships" xmlns:p="http://schemas.openxmlformats.org/presentationml/2006/main">
+  <p:cSld>
+    <p:spTree>
+      <p:nvGrpSpPr>
+        <p:cNvPr id="1" name="">
+          <a:extLst>
+            <a:ext uri="{FF2B5EF4-FFF2-40B4-BE49-F238E27FC236}">
+              <a16:creationId xmlns:a16="http://schemas.microsoft.com/office/drawing/2014/main" id="{E5DA30BA-C5A9-A2CA-9663-2CE9332E9F3E}"/>
+            </a:ext>
+          </a:extLst>
+        </p:cNvPr>
+        <p:cNvGrpSpPr/>
+        <p:nvPr/>
+      </p:nvGrpSpPr>
+      <p:grpSpPr>
+        <a:xfrm>
+          <a:off x="0" y="0"/>
+          <a:ext cx="0" cy="0"/>
+          <a:chOff x="0" y="0"/>
+          <a:chExt cx="0" cy="0"/>
+        </a:xfrm>
+      </p:grpSpPr>
+      <p:sp>
+        <p:nvSpPr>
+          <p:cNvPr id="3" name="TextBox 2">
+            <a:extLst>
+              <a:ext uri="{FF2B5EF4-FFF2-40B4-BE49-F238E27FC236}">
+                <a16:creationId xmlns:a16="http://schemas.microsoft.com/office/drawing/2014/main" id="{D03D10E6-F870-ED9D-4E14-8A4B29D9B8CB}"/>
+              </a:ext>
+            </a:extLst>
+          </p:cNvPr>
+          <p:cNvSpPr txBox="1"/>
+          <p:nvPr/>
+        </p:nvSpPr>
+        <p:spPr>
+          <a:xfrm>
+            <a:off x="217714" y="255046"/>
+            <a:ext cx="11756571" cy="355354"/>
+          </a:xfrm>
+          <a:prstGeom prst="rect">
+            <a:avLst/>
+          </a:prstGeom>
+          <a:noFill/>
+        </p:spPr>
+        <p:txBody>
+          <a:bodyPr wrap="square">
+            <a:spAutoFit/>
+          </a:bodyPr>
+          <a:lstStyle/>
+          <a:p>
+            <a:pPr>
+              <a:lnSpc>
+                <a:spcPct val="150000"/>
+              </a:lnSpc>
+              <a:buNone/>
+            </a:pPr>
+            <a:r>
+              <a:rPr kumimoji="0" lang="en-US" altLang="en-US" sz="1300" b="0" i="0" u="none" strike="noStrike" cap="none" normalizeH="0" baseline="0">
+                <a:ln>
+                  <a:noFill/>
+                </a:ln>
+                <a:solidFill>
+                  <a:schemeClr val="tx1"/>
+                </a:solidFill>
+                <a:effectLst/>
+                <a:latin typeface="Arial" panose="020B0604020202020204" pitchFamily="34" charset="0"/>
+              </a:rPr>
+              <a:t>.</a:t>
+            </a:r>
+          </a:p>
+        </p:txBody>
+      </p:sp>
+    </p:spTree>
+    <p:extLst>
+      <p:ext uri="{BB962C8B-B14F-4D97-AF65-F5344CB8AC3E}">
+        <p14:creationId xmlns:p14="http://schemas.microsoft.com/office/powerpoint/2010/main" val="2108829988"/>
+      </p:ext>
+    </p:extLst>
+  </p:cSld>
+  <p:clrMapOvr>
+    <a:masterClrMapping/>
+  </p:clrMapOvr>
+</p:sld>
+</file>
+
 <file path=ppt/slides/slide2.xml><?xml version="1.0" encoding="utf-8"?>
+<p:sld xmlns:a="http://schemas.openxmlformats.org/drawingml/2006/main" xmlns:r="http://schemas.openxmlformats.org/officeDocument/2006/relationships" xmlns:p="http://schemas.openxmlformats.org/presentationml/2006/main">
+  <p:cSld>
+    <p:spTree>
+      <p:nvGrpSpPr>
+        <p:cNvPr id="1" name="">
+          <a:extLst>
+            <a:ext uri="{FF2B5EF4-FFF2-40B4-BE49-F238E27FC236}">
+              <a16:creationId xmlns:a16="http://schemas.microsoft.com/office/drawing/2014/main" id="{F6C13FCC-E5C4-2350-20C6-89DF22D1F3E0}"/>
+            </a:ext>
+          </a:extLst>
+        </p:cNvPr>
+        <p:cNvGrpSpPr/>
+        <p:nvPr/>
+      </p:nvGrpSpPr>
+      <p:grpSpPr>
+        <a:xfrm>
+          <a:off x="0" y="0"/>
+          <a:ext cx="0" cy="0"/>
+          <a:chOff x="0" y="0"/>
+          <a:chExt cx="0" cy="0"/>
+        </a:xfrm>
+      </p:grpSpPr>
+      <p:sp>
+        <p:nvSpPr>
+          <p:cNvPr id="3" name="TextBox 2">
+            <a:extLst>
+              <a:ext uri="{FF2B5EF4-FFF2-40B4-BE49-F238E27FC236}">
+                <a16:creationId xmlns:a16="http://schemas.microsoft.com/office/drawing/2014/main" id="{81782941-0DB4-B0DA-A36A-31CA5EC69992}"/>
+              </a:ext>
+            </a:extLst>
+          </p:cNvPr>
+          <p:cNvSpPr txBox="1"/>
+          <p:nvPr/>
+        </p:nvSpPr>
+        <p:spPr>
+          <a:xfrm>
+            <a:off x="217714" y="255046"/>
+            <a:ext cx="11756571" cy="355354"/>
+          </a:xfrm>
+          <a:prstGeom prst="rect">
+            <a:avLst/>
+          </a:prstGeom>
+          <a:noFill/>
+        </p:spPr>
+        <p:txBody>
+          <a:bodyPr wrap="square">
+            <a:spAutoFit/>
+          </a:bodyPr>
+          <a:lstStyle/>
+          <a:p>
+            <a:pPr>
+              <a:lnSpc>
+                <a:spcPct val="150000"/>
+              </a:lnSpc>
+              <a:buNone/>
+            </a:pPr>
+            <a:r>
+              <a:rPr kumimoji="0" lang="az-Latn-AZ" altLang="en-US" sz="1300" b="0" i="0" u="none" strike="noStrike" cap="none" normalizeH="0" baseline="0">
+                <a:ln>
+                  <a:noFill/>
+                </a:ln>
+                <a:solidFill>
+                  <a:schemeClr val="tx1"/>
+                </a:solidFill>
+                <a:effectLst/>
+                <a:latin typeface="Arial" panose="020B0604020202020204" pitchFamily="34" charset="0"/>
+              </a:rPr>
+              <a:t>İndi </a:t>
+            </a:r>
+            <a:r>
+              <a:rPr kumimoji="0" lang="az-Latn-AZ" altLang="en-US" sz="1300" b="1" i="0" u="none" strike="noStrike" cap="none" normalizeH="0" baseline="0">
+                <a:ln>
+                  <a:noFill/>
+                </a:ln>
+                <a:solidFill>
+                  <a:schemeClr val="tx1"/>
+                </a:solidFill>
+                <a:effectLst/>
+                <a:latin typeface="Arial" panose="020B0604020202020204" pitchFamily="34" charset="0"/>
+              </a:rPr>
+              <a:t>Create</a:t>
+            </a:r>
+            <a:r>
+              <a:rPr kumimoji="0" lang="az-Latn-AZ" altLang="en-US" sz="1300" b="0" i="0" u="none" strike="noStrike" cap="none" normalizeH="0" baseline="0">
+                <a:ln>
+                  <a:noFill/>
+                </a:ln>
+                <a:solidFill>
+                  <a:schemeClr val="tx1"/>
+                </a:solidFill>
+                <a:effectLst/>
+                <a:latin typeface="Arial" panose="020B0604020202020204" pitchFamily="34" charset="0"/>
+              </a:rPr>
+              <a:t> səhifəmizi formalaşdıra bilərik. </a:t>
+            </a:r>
+            <a:r>
+              <a:rPr lang="az-Latn-AZ" altLang="en-US" sz="1300">
+                <a:latin typeface="Arial" panose="020B0604020202020204" pitchFamily="34" charset="0"/>
+              </a:rPr>
+              <a:t>Kodlar və nəticə növbəti slayddadır. </a:t>
+            </a:r>
+            <a:endParaRPr kumimoji="0" lang="en-US" altLang="en-US" sz="1300" b="0" i="0" u="none" strike="noStrike" cap="none" normalizeH="0" baseline="0">
+              <a:ln>
+                <a:noFill/>
+              </a:ln>
+              <a:solidFill>
+                <a:schemeClr val="tx1"/>
+              </a:solidFill>
+              <a:effectLst/>
+              <a:latin typeface="Arial" panose="020B0604020202020204" pitchFamily="34" charset="0"/>
+            </a:endParaRPr>
+          </a:p>
+        </p:txBody>
+      </p:sp>
+    </p:spTree>
+    <p:extLst>
+      <p:ext uri="{BB962C8B-B14F-4D97-AF65-F5344CB8AC3E}">
+        <p14:creationId xmlns:p14="http://schemas.microsoft.com/office/powerpoint/2010/main" val="2667607345"/>
+      </p:ext>
+    </p:extLst>
+  </p:cSld>
+  <p:clrMapOvr>
+    <a:masterClrMapping/>
+  </p:clrMapOvr>
+</p:sld>
+</file>
+
+<file path=ppt/slides/slide3.xml><?xml version="1.0" encoding="utf-8"?>
 <p:sld xmlns:a="http://schemas.openxmlformats.org/drawingml/2006/main" xmlns:r="http://schemas.openxmlformats.org/officeDocument/2006/relationships" xmlns:p="http://schemas.openxmlformats.org/presentationml/2006/main">
   <p:cSld>
     <p:spTree>
@@ -3471,96 +4110,84 @@
           </a:p>
         </p:txBody>
       </p:sp>
+      <p:pic>
+        <p:nvPicPr>
+          <p:cNvPr id="4" name="Picture 3">
+            <a:extLst>
+              <a:ext uri="{FF2B5EF4-FFF2-40B4-BE49-F238E27FC236}">
+                <a16:creationId xmlns:a16="http://schemas.microsoft.com/office/drawing/2014/main" id="{6D6FDDEE-622E-FEF0-3176-EF9ADEABA146}"/>
+              </a:ext>
+            </a:extLst>
+          </p:cNvPr>
+          <p:cNvPicPr>
+            <a:picLocks noChangeAspect="1"/>
+          </p:cNvPicPr>
+          <p:nvPr/>
+        </p:nvPicPr>
+        <p:blipFill>
+          <a:blip r:embed="rId2"/>
+          <a:stretch>
+            <a:fillRect/>
+          </a:stretch>
+        </p:blipFill>
+        <p:spPr>
+          <a:xfrm>
+            <a:off x="5404410" y="0"/>
+            <a:ext cx="6787590" cy="6858000"/>
+          </a:xfrm>
+          <a:prstGeom prst="rect">
+            <a:avLst/>
+          </a:prstGeom>
+        </p:spPr>
+      </p:pic>
+      <p:pic>
+        <p:nvPicPr>
+          <p:cNvPr id="6" name="Picture 5">
+            <a:extLst>
+              <a:ext uri="{FF2B5EF4-FFF2-40B4-BE49-F238E27FC236}">
+                <a16:creationId xmlns:a16="http://schemas.microsoft.com/office/drawing/2014/main" id="{33FD6F23-0CED-0A89-A955-BFEBEED167B8}"/>
+              </a:ext>
+            </a:extLst>
+          </p:cNvPr>
+          <p:cNvPicPr>
+            <a:picLocks noChangeAspect="1"/>
+          </p:cNvPicPr>
+          <p:nvPr/>
+        </p:nvPicPr>
+        <p:blipFill>
+          <a:blip r:embed="rId3"/>
+          <a:stretch>
+            <a:fillRect/>
+          </a:stretch>
+        </p:blipFill>
+        <p:spPr>
+          <a:xfrm>
+            <a:off x="10294" y="-1"/>
+            <a:ext cx="5176401" cy="6858001"/>
+          </a:xfrm>
+          <a:prstGeom prst="rect">
+            <a:avLst/>
+          </a:prstGeom>
+          <a:ln w="38100" cap="sq">
+            <a:solidFill>
+              <a:srgbClr val="000000"/>
+            </a:solidFill>
+            <a:prstDash val="solid"/>
+            <a:miter lim="800000"/>
+          </a:ln>
+          <a:effectLst>
+            <a:outerShdw blurRad="50800" dist="38100" dir="2700000" algn="tl" rotWithShape="0">
+              <a:srgbClr val="000000">
+                <a:alpha val="43000"/>
+              </a:srgbClr>
+            </a:outerShdw>
+          </a:effectLst>
+        </p:spPr>
+      </p:pic>
     </p:spTree>
     <p:extLst>
       <p:ext uri="{BB962C8B-B14F-4D97-AF65-F5344CB8AC3E}">
         <p14:creationId xmlns:p14="http://schemas.microsoft.com/office/powerpoint/2010/main" val="2486611332"/>
-      </p:ext>
-    </p:extLst>
-  </p:cSld>
-  <p:clrMapOvr>
-    <a:masterClrMapping/>
-  </p:clrMapOvr>
-</p:sld>
-</file>
-
-<file path=ppt/slides/slide3.xml><?xml version="1.0" encoding="utf-8"?>
-<p:sld xmlns:a="http://schemas.openxmlformats.org/drawingml/2006/main" xmlns:r="http://schemas.openxmlformats.org/officeDocument/2006/relationships" xmlns:p="http://schemas.openxmlformats.org/presentationml/2006/main">
-  <p:cSld>
-    <p:spTree>
-      <p:nvGrpSpPr>
-        <p:cNvPr id="1" name="">
-          <a:extLst>
-            <a:ext uri="{FF2B5EF4-FFF2-40B4-BE49-F238E27FC236}">
-              <a16:creationId xmlns:a16="http://schemas.microsoft.com/office/drawing/2014/main" id="{F6C13FCC-E5C4-2350-20C6-89DF22D1F3E0}"/>
-            </a:ext>
-          </a:extLst>
-        </p:cNvPr>
-        <p:cNvGrpSpPr/>
-        <p:nvPr/>
-      </p:nvGrpSpPr>
-      <p:grpSpPr>
-        <a:xfrm>
-          <a:off x="0" y="0"/>
-          <a:ext cx="0" cy="0"/>
-          <a:chOff x="0" y="0"/>
-          <a:chExt cx="0" cy="0"/>
-        </a:xfrm>
-      </p:grpSpPr>
-      <p:sp>
-        <p:nvSpPr>
-          <p:cNvPr id="3" name="TextBox 2">
-            <a:extLst>
-              <a:ext uri="{FF2B5EF4-FFF2-40B4-BE49-F238E27FC236}">
-                <a16:creationId xmlns:a16="http://schemas.microsoft.com/office/drawing/2014/main" id="{81782941-0DB4-B0DA-A36A-31CA5EC69992}"/>
-              </a:ext>
-            </a:extLst>
-          </p:cNvPr>
-          <p:cNvSpPr txBox="1"/>
-          <p:nvPr/>
-        </p:nvSpPr>
-        <p:spPr>
-          <a:xfrm>
-            <a:off x="217714" y="255046"/>
-            <a:ext cx="11756571" cy="355354"/>
-          </a:xfrm>
-          <a:prstGeom prst="rect">
-            <a:avLst/>
-          </a:prstGeom>
-          <a:noFill/>
-        </p:spPr>
-        <p:txBody>
-          <a:bodyPr wrap="square">
-            <a:spAutoFit/>
-          </a:bodyPr>
-          <a:lstStyle/>
-          <a:p>
-            <a:pPr>
-              <a:lnSpc>
-                <a:spcPct val="150000"/>
-              </a:lnSpc>
-              <a:buNone/>
-            </a:pPr>
-            <a:r>
-              <a:rPr kumimoji="0" lang="en-US" altLang="en-US" sz="1300" b="0" i="0" u="none" strike="noStrike" cap="none" normalizeH="0" baseline="0">
-                <a:ln>
-                  <a:noFill/>
-                </a:ln>
-                <a:solidFill>
-                  <a:schemeClr val="tx1"/>
-                </a:solidFill>
-                <a:effectLst/>
-                <a:latin typeface="Arial" panose="020B0604020202020204" pitchFamily="34" charset="0"/>
-              </a:rPr>
-              <a:t>.</a:t>
-            </a:r>
-          </a:p>
-        </p:txBody>
-      </p:sp>
-    </p:spTree>
-    <p:extLst>
-      <p:ext uri="{BB962C8B-B14F-4D97-AF65-F5344CB8AC3E}">
-        <p14:creationId xmlns:p14="http://schemas.microsoft.com/office/powerpoint/2010/main" val="2667607345"/>
       </p:ext>
     </p:extLst>
   </p:cSld>
@@ -3608,6 +4235,469 @@
         <p:spPr>
           <a:xfrm>
             <a:off x="217714" y="255046"/>
+            <a:ext cx="5802953" cy="2155847"/>
+          </a:xfrm>
+          <a:prstGeom prst="rect">
+            <a:avLst/>
+          </a:prstGeom>
+          <a:noFill/>
+        </p:spPr>
+        <p:txBody>
+          <a:bodyPr wrap="square">
+            <a:spAutoFit/>
+          </a:bodyPr>
+          <a:lstStyle/>
+          <a:p>
+            <a:pPr algn="just">
+              <a:lnSpc>
+                <a:spcPct val="150000"/>
+              </a:lnSpc>
+              <a:buNone/>
+            </a:pPr>
+            <a:r>
+              <a:rPr lang="az-Latn-AZ" altLang="en-US" sz="1300" b="1">
+                <a:latin typeface="Arial" panose="020B0604020202020204" pitchFamily="34" charset="0"/>
+              </a:rPr>
+              <a:t>Create</a:t>
+            </a:r>
+            <a:r>
+              <a:rPr lang="az-Latn-AZ" altLang="en-US" sz="1300">
+                <a:latin typeface="Arial" panose="020B0604020202020204" pitchFamily="34" charset="0"/>
+              </a:rPr>
+              <a:t> səhifəsi </a:t>
+            </a:r>
+            <a:r>
+              <a:rPr lang="az-Latn-AZ" altLang="en-US" sz="1300" b="1">
+                <a:latin typeface="Arial" panose="020B0604020202020204" pitchFamily="34" charset="0"/>
+              </a:rPr>
+              <a:t>post</a:t>
+            </a:r>
+            <a:r>
+              <a:rPr lang="az-Latn-AZ" altLang="en-US" sz="1300">
+                <a:latin typeface="Arial" panose="020B0604020202020204" pitchFamily="34" charset="0"/>
+              </a:rPr>
+              <a:t> yaratmaq üçündür. Bizim birdə </a:t>
+            </a:r>
+            <a:r>
+              <a:rPr lang="az-Latn-AZ" altLang="en-US" sz="1300" b="1">
+                <a:solidFill>
+                  <a:srgbClr val="FF0000"/>
+                </a:solidFill>
+                <a:latin typeface="Arial" panose="020B0604020202020204" pitchFamily="34" charset="0"/>
+              </a:rPr>
+              <a:t>EDİT</a:t>
+            </a:r>
+            <a:r>
+              <a:rPr lang="az-Latn-AZ" altLang="en-US" sz="1300">
+                <a:latin typeface="Arial" panose="020B0604020202020204" pitchFamily="34" charset="0"/>
+              </a:rPr>
+              <a:t> səhifəsinə ehtiyacımız var ki, əvvəl yaradılan </a:t>
+            </a:r>
+            <a:r>
+              <a:rPr lang="az-Latn-AZ" altLang="en-US" sz="1300" b="1">
+                <a:latin typeface="Arial" panose="020B0604020202020204" pitchFamily="34" charset="0"/>
+              </a:rPr>
+              <a:t>postları</a:t>
+            </a:r>
+            <a:r>
+              <a:rPr lang="az-Latn-AZ" altLang="en-US" sz="1300">
+                <a:latin typeface="Arial" panose="020B0604020202020204" pitchFamily="34" charset="0"/>
+              </a:rPr>
+              <a:t> </a:t>
+            </a:r>
+            <a:r>
+              <a:rPr lang="az-Latn-AZ" altLang="en-US" sz="1300" b="1">
+                <a:latin typeface="Arial" panose="020B0604020202020204" pitchFamily="34" charset="0"/>
+              </a:rPr>
+              <a:t>redaktə</a:t>
+            </a:r>
+            <a:r>
+              <a:rPr lang="az-Latn-AZ" altLang="en-US" sz="1300">
+                <a:latin typeface="Arial" panose="020B0604020202020204" pitchFamily="34" charset="0"/>
+              </a:rPr>
+              <a:t> edə bilək.</a:t>
+            </a:r>
+            <a:r>
+              <a:rPr lang="en-US" altLang="en-US" sz="1300">
+                <a:latin typeface="Arial" panose="020B0604020202020204" pitchFamily="34" charset="0"/>
+              </a:rPr>
+              <a:t> Bunun </a:t>
+            </a:r>
+            <a:r>
+              <a:rPr lang="az-Latn-AZ" altLang="en-US" sz="1300">
+                <a:latin typeface="Arial" panose="020B0604020202020204" pitchFamily="34" charset="0"/>
+              </a:rPr>
+              <a:t>üçün </a:t>
+            </a:r>
+            <a:r>
+              <a:rPr lang="az-Latn-AZ" altLang="en-US" sz="1300" b="1">
+                <a:latin typeface="Arial" panose="020B0604020202020204" pitchFamily="34" charset="0"/>
+              </a:rPr>
+              <a:t>create.blade.php</a:t>
+            </a:r>
+            <a:r>
+              <a:rPr lang="az-Latn-AZ" altLang="en-US" sz="1300">
+                <a:latin typeface="Arial" panose="020B0604020202020204" pitchFamily="34" charset="0"/>
+              </a:rPr>
+              <a:t> faylını </a:t>
+            </a:r>
+            <a:r>
+              <a:rPr lang="az-Latn-AZ" altLang="en-US" sz="1300" b="1">
+                <a:latin typeface="Arial" panose="020B0604020202020204" pitchFamily="34" charset="0"/>
+              </a:rPr>
+              <a:t>copy past </a:t>
+            </a:r>
+            <a:r>
+              <a:rPr lang="az-Latn-AZ" altLang="en-US" sz="1300">
+                <a:latin typeface="Arial" panose="020B0604020202020204" pitchFamily="34" charset="0"/>
+              </a:rPr>
+              <a:t>edirik. </a:t>
+            </a:r>
+            <a:endParaRPr lang="en-US" altLang="en-US" sz="1300">
+              <a:latin typeface="Arial" panose="020B0604020202020204" pitchFamily="34" charset="0"/>
+            </a:endParaRPr>
+          </a:p>
+          <a:p>
+            <a:pPr algn="just">
+              <a:lnSpc>
+                <a:spcPct val="150000"/>
+              </a:lnSpc>
+              <a:buNone/>
+            </a:pPr>
+            <a:endParaRPr kumimoji="0" lang="en-US" altLang="en-US" sz="1300" b="0" i="0" u="none" strike="noStrike" cap="none" normalizeH="0" baseline="0">
+              <a:ln>
+                <a:noFill/>
+              </a:ln>
+              <a:solidFill>
+                <a:schemeClr val="tx1"/>
+              </a:solidFill>
+              <a:effectLst/>
+              <a:latin typeface="Arial" panose="020B0604020202020204" pitchFamily="34" charset="0"/>
+            </a:endParaRPr>
+          </a:p>
+          <a:p>
+            <a:pPr algn="just">
+              <a:lnSpc>
+                <a:spcPct val="150000"/>
+              </a:lnSpc>
+              <a:buNone/>
+            </a:pPr>
+            <a:endParaRPr kumimoji="0" lang="az-Latn-AZ" altLang="en-US" sz="1300" b="0" i="0" u="none" strike="noStrike" cap="none" normalizeH="0" baseline="0">
+              <a:ln>
+                <a:noFill/>
+              </a:ln>
+              <a:solidFill>
+                <a:schemeClr val="tx1"/>
+              </a:solidFill>
+              <a:effectLst/>
+              <a:latin typeface="Arial" panose="020B0604020202020204" pitchFamily="34" charset="0"/>
+            </a:endParaRPr>
+          </a:p>
+          <a:p>
+            <a:pPr algn="just">
+              <a:lnSpc>
+                <a:spcPct val="150000"/>
+              </a:lnSpc>
+              <a:buNone/>
+            </a:pPr>
+            <a:r>
+              <a:rPr kumimoji="0" lang="az-Latn-AZ" altLang="en-US" sz="1300" b="0" i="0" u="none" strike="noStrike" cap="none" normalizeH="0" baseline="0">
+                <a:ln>
+                  <a:noFill/>
+                </a:ln>
+                <a:solidFill>
+                  <a:schemeClr val="tx1"/>
+                </a:solidFill>
+                <a:effectLst/>
+                <a:latin typeface="Arial" panose="020B0604020202020204" pitchFamily="34" charset="0"/>
+              </a:rPr>
+              <a:t>Hələki redaktə falan etmirik sadəcə </a:t>
+            </a:r>
+            <a:r>
+              <a:rPr lang="az-Latn-AZ" altLang="en-US" sz="1300">
+                <a:latin typeface="Arial" panose="020B0604020202020204" pitchFamily="34" charset="0"/>
+              </a:rPr>
+              <a:t>yaradaq bu faylı. Sonra </a:t>
+            </a:r>
+            <a:r>
+              <a:rPr lang="az-Latn-AZ" altLang="en-US" sz="1300" b="1">
+                <a:solidFill>
+                  <a:srgbClr val="FF0000"/>
+                </a:solidFill>
+                <a:latin typeface="Arial" panose="020B0604020202020204" pitchFamily="34" charset="0"/>
+              </a:rPr>
+              <a:t>TRASHED</a:t>
+            </a:r>
+            <a:r>
+              <a:rPr lang="az-Latn-AZ" altLang="en-US" sz="1300">
+                <a:latin typeface="Arial" panose="020B0604020202020204" pitchFamily="34" charset="0"/>
+              </a:rPr>
+              <a:t> faylını yaradacağıq.</a:t>
+            </a:r>
+            <a:endParaRPr kumimoji="0" lang="en-US" altLang="en-US" sz="1300" b="0" i="0" u="none" strike="noStrike" cap="none" normalizeH="0" baseline="0">
+              <a:ln>
+                <a:noFill/>
+              </a:ln>
+              <a:solidFill>
+                <a:schemeClr val="tx1"/>
+              </a:solidFill>
+              <a:effectLst/>
+              <a:latin typeface="Arial" panose="020B0604020202020204" pitchFamily="34" charset="0"/>
+            </a:endParaRPr>
+          </a:p>
+        </p:txBody>
+      </p:sp>
+      <p:pic>
+        <p:nvPicPr>
+          <p:cNvPr id="4" name="Picture 3">
+            <a:extLst>
+              <a:ext uri="{FF2B5EF4-FFF2-40B4-BE49-F238E27FC236}">
+                <a16:creationId xmlns:a16="http://schemas.microsoft.com/office/drawing/2014/main" id="{94599D52-FB7D-7E74-287A-F1F94FC295EC}"/>
+              </a:ext>
+            </a:extLst>
+          </p:cNvPr>
+          <p:cNvPicPr>
+            <a:picLocks noChangeAspect="1"/>
+          </p:cNvPicPr>
+          <p:nvPr/>
+        </p:nvPicPr>
+        <p:blipFill>
+          <a:blip r:embed="rId2"/>
+          <a:stretch>
+            <a:fillRect/>
+          </a:stretch>
+        </p:blipFill>
+        <p:spPr>
+          <a:xfrm>
+            <a:off x="6171334" y="0"/>
+            <a:ext cx="6017524" cy="6858000"/>
+          </a:xfrm>
+          <a:prstGeom prst="rect">
+            <a:avLst/>
+          </a:prstGeom>
+        </p:spPr>
+      </p:pic>
+    </p:spTree>
+    <p:extLst>
+      <p:ext uri="{BB962C8B-B14F-4D97-AF65-F5344CB8AC3E}">
+        <p14:creationId xmlns:p14="http://schemas.microsoft.com/office/powerpoint/2010/main" val="3095838342"/>
+      </p:ext>
+    </p:extLst>
+  </p:cSld>
+  <p:clrMapOvr>
+    <a:masterClrMapping/>
+  </p:clrMapOvr>
+</p:sld>
+</file>
+
+<file path=ppt/slides/slide5.xml><?xml version="1.0" encoding="utf-8"?>
+<p:sld xmlns:a="http://schemas.openxmlformats.org/drawingml/2006/main" xmlns:r="http://schemas.openxmlformats.org/officeDocument/2006/relationships" xmlns:p="http://schemas.openxmlformats.org/presentationml/2006/main">
+  <p:cSld>
+    <p:spTree>
+      <p:nvGrpSpPr>
+        <p:cNvPr id="1" name="">
+          <a:extLst>
+            <a:ext uri="{FF2B5EF4-FFF2-40B4-BE49-F238E27FC236}">
+              <a16:creationId xmlns:a16="http://schemas.microsoft.com/office/drawing/2014/main" id="{2845591E-8093-CCBB-65A3-9EF8E9815AC7}"/>
+            </a:ext>
+          </a:extLst>
+        </p:cNvPr>
+        <p:cNvGrpSpPr/>
+        <p:nvPr/>
+      </p:nvGrpSpPr>
+      <p:grpSpPr>
+        <a:xfrm>
+          <a:off x="0" y="0"/>
+          <a:ext cx="0" cy="0"/>
+          <a:chOff x="0" y="0"/>
+          <a:chExt cx="0" cy="0"/>
+        </a:xfrm>
+      </p:grpSpPr>
+      <p:sp>
+        <p:nvSpPr>
+          <p:cNvPr id="3" name="TextBox 2">
+            <a:extLst>
+              <a:ext uri="{FF2B5EF4-FFF2-40B4-BE49-F238E27FC236}">
+                <a16:creationId xmlns:a16="http://schemas.microsoft.com/office/drawing/2014/main" id="{5001DEF2-E66A-DBAA-E132-A360D8743D45}"/>
+              </a:ext>
+            </a:extLst>
+          </p:cNvPr>
+          <p:cNvSpPr txBox="1"/>
+          <p:nvPr/>
+        </p:nvSpPr>
+        <p:spPr>
+          <a:xfrm>
+            <a:off x="217714" y="255046"/>
+            <a:ext cx="2299243" cy="955518"/>
+          </a:xfrm>
+          <a:prstGeom prst="rect">
+            <a:avLst/>
+          </a:prstGeom>
+          <a:noFill/>
+        </p:spPr>
+        <p:txBody>
+          <a:bodyPr wrap="square">
+            <a:spAutoFit/>
+          </a:bodyPr>
+          <a:lstStyle/>
+          <a:p>
+            <a:pPr algn="just">
+              <a:lnSpc>
+                <a:spcPct val="150000"/>
+              </a:lnSpc>
+              <a:buNone/>
+            </a:pPr>
+            <a:r>
+              <a:rPr lang="az-Latn-AZ" altLang="en-US" sz="1300" b="1">
+                <a:solidFill>
+                  <a:srgbClr val="FF0000"/>
+                </a:solidFill>
+                <a:latin typeface="Arial" panose="020B0604020202020204" pitchFamily="34" charset="0"/>
+              </a:rPr>
+              <a:t>Trashed</a:t>
+            </a:r>
+            <a:r>
+              <a:rPr lang="az-Latn-AZ" altLang="en-US" sz="1300">
+                <a:latin typeface="Arial" panose="020B0604020202020204" pitchFamily="34" charset="0"/>
+              </a:rPr>
+              <a:t> faylını yaratmaq üçün də, </a:t>
+            </a:r>
+            <a:r>
+              <a:rPr lang="az-Latn-AZ" altLang="en-US" sz="1300" b="1">
+                <a:latin typeface="Arial" panose="020B0604020202020204" pitchFamily="34" charset="0"/>
+              </a:rPr>
+              <a:t>index.blade.php </a:t>
+            </a:r>
+            <a:r>
+              <a:rPr lang="az-Latn-AZ" altLang="en-US" sz="1300">
+                <a:latin typeface="Arial" panose="020B0604020202020204" pitchFamily="34" charset="0"/>
+              </a:rPr>
+              <a:t>faylını copy past edirik. </a:t>
+            </a:r>
+            <a:endParaRPr kumimoji="0" lang="en-US" altLang="en-US" sz="1300" b="0" i="0" u="none" strike="noStrike" cap="none" normalizeH="0" baseline="0">
+              <a:ln>
+                <a:noFill/>
+              </a:ln>
+              <a:solidFill>
+                <a:schemeClr val="tx1"/>
+              </a:solidFill>
+              <a:effectLst/>
+              <a:latin typeface="Arial" panose="020B0604020202020204" pitchFamily="34" charset="0"/>
+            </a:endParaRPr>
+          </a:p>
+        </p:txBody>
+      </p:sp>
+      <p:pic>
+        <p:nvPicPr>
+          <p:cNvPr id="4" name="Picture 3">
+            <a:extLst>
+              <a:ext uri="{FF2B5EF4-FFF2-40B4-BE49-F238E27FC236}">
+                <a16:creationId xmlns:a16="http://schemas.microsoft.com/office/drawing/2014/main" id="{227BACF3-2218-1394-33D2-187022D00EB5}"/>
+              </a:ext>
+            </a:extLst>
+          </p:cNvPr>
+          <p:cNvPicPr>
+            <a:picLocks noChangeAspect="1"/>
+          </p:cNvPicPr>
+          <p:nvPr/>
+        </p:nvPicPr>
+        <p:blipFill>
+          <a:blip r:embed="rId2"/>
+          <a:stretch>
+            <a:fillRect/>
+          </a:stretch>
+        </p:blipFill>
+        <p:spPr>
+          <a:xfrm>
+            <a:off x="2757013" y="0"/>
+            <a:ext cx="9434987" cy="6858000"/>
+          </a:xfrm>
+          <a:prstGeom prst="rect">
+            <a:avLst/>
+          </a:prstGeom>
+        </p:spPr>
+      </p:pic>
+      <p:pic>
+        <p:nvPicPr>
+          <p:cNvPr id="6" name="Picture 5">
+            <a:extLst>
+              <a:ext uri="{FF2B5EF4-FFF2-40B4-BE49-F238E27FC236}">
+                <a16:creationId xmlns:a16="http://schemas.microsoft.com/office/drawing/2014/main" id="{ADE9BE1E-9FAD-DC4A-1328-AF221F1A250D}"/>
+              </a:ext>
+            </a:extLst>
+          </p:cNvPr>
+          <p:cNvPicPr>
+            <a:picLocks noChangeAspect="1"/>
+          </p:cNvPicPr>
+          <p:nvPr/>
+        </p:nvPicPr>
+        <p:blipFill>
+          <a:blip r:embed="rId3"/>
+          <a:stretch>
+            <a:fillRect/>
+          </a:stretch>
+        </p:blipFill>
+        <p:spPr>
+          <a:xfrm>
+            <a:off x="0" y="4971787"/>
+            <a:ext cx="2505425" cy="1886213"/>
+          </a:xfrm>
+          <a:prstGeom prst="rect">
+            <a:avLst/>
+          </a:prstGeom>
+        </p:spPr>
+      </p:pic>
+    </p:spTree>
+    <p:extLst>
+      <p:ext uri="{BB962C8B-B14F-4D97-AF65-F5344CB8AC3E}">
+        <p14:creationId xmlns:p14="http://schemas.microsoft.com/office/powerpoint/2010/main" val="3114102358"/>
+      </p:ext>
+    </p:extLst>
+  </p:cSld>
+  <p:clrMapOvr>
+    <a:masterClrMapping/>
+  </p:clrMapOvr>
+</p:sld>
+</file>
+
+<file path=ppt/slides/slide6.xml><?xml version="1.0" encoding="utf-8"?>
+<p:sld xmlns:a="http://schemas.openxmlformats.org/drawingml/2006/main" xmlns:r="http://schemas.openxmlformats.org/officeDocument/2006/relationships" xmlns:p="http://schemas.openxmlformats.org/presentationml/2006/main">
+  <p:cSld>
+    <p:spTree>
+      <p:nvGrpSpPr>
+        <p:cNvPr id="1" name="">
+          <a:extLst>
+            <a:ext uri="{FF2B5EF4-FFF2-40B4-BE49-F238E27FC236}">
+              <a16:creationId xmlns:a16="http://schemas.microsoft.com/office/drawing/2014/main" id="{0856F6FD-04E1-DA6C-04A2-6E14F89364CD}"/>
+            </a:ext>
+          </a:extLst>
+        </p:cNvPr>
+        <p:cNvGrpSpPr/>
+        <p:nvPr/>
+      </p:nvGrpSpPr>
+      <p:grpSpPr>
+        <a:xfrm>
+          <a:off x="0" y="0"/>
+          <a:ext cx="0" cy="0"/>
+          <a:chOff x="0" y="0"/>
+          <a:chExt cx="0" cy="0"/>
+        </a:xfrm>
+      </p:grpSpPr>
+      <p:sp>
+        <p:nvSpPr>
+          <p:cNvPr id="3" name="TextBox 2">
+            <a:extLst>
+              <a:ext uri="{FF2B5EF4-FFF2-40B4-BE49-F238E27FC236}">
+                <a16:creationId xmlns:a16="http://schemas.microsoft.com/office/drawing/2014/main" id="{41ED9595-6E34-FFB0-9866-8DA5EE105912}"/>
+              </a:ext>
+            </a:extLst>
+          </p:cNvPr>
+          <p:cNvSpPr txBox="1"/>
+          <p:nvPr/>
+        </p:nvSpPr>
+        <p:spPr>
+          <a:xfrm>
+            <a:off x="217714" y="255046"/>
             <a:ext cx="11756571" cy="355354"/>
           </a:xfrm>
           <a:prstGeom prst="rect">
@@ -3646,7 +4736,265 @@
     </p:spTree>
     <p:extLst>
       <p:ext uri="{BB962C8B-B14F-4D97-AF65-F5344CB8AC3E}">
-        <p14:creationId xmlns:p14="http://schemas.microsoft.com/office/powerpoint/2010/main" val="3095838342"/>
+        <p14:creationId xmlns:p14="http://schemas.microsoft.com/office/powerpoint/2010/main" val="1007345377"/>
+      </p:ext>
+    </p:extLst>
+  </p:cSld>
+  <p:clrMapOvr>
+    <a:masterClrMapping/>
+  </p:clrMapOvr>
+</p:sld>
+</file>
+
+<file path=ppt/slides/slide7.xml><?xml version="1.0" encoding="utf-8"?>
+<p:sld xmlns:a="http://schemas.openxmlformats.org/drawingml/2006/main" xmlns:r="http://schemas.openxmlformats.org/officeDocument/2006/relationships" xmlns:p="http://schemas.openxmlformats.org/presentationml/2006/main">
+  <p:cSld>
+    <p:spTree>
+      <p:nvGrpSpPr>
+        <p:cNvPr id="1" name="">
+          <a:extLst>
+            <a:ext uri="{FF2B5EF4-FFF2-40B4-BE49-F238E27FC236}">
+              <a16:creationId xmlns:a16="http://schemas.microsoft.com/office/drawing/2014/main" id="{D62CF02A-5EA6-3513-A003-ED49E030A3B3}"/>
+            </a:ext>
+          </a:extLst>
+        </p:cNvPr>
+        <p:cNvGrpSpPr/>
+        <p:nvPr/>
+      </p:nvGrpSpPr>
+      <p:grpSpPr>
+        <a:xfrm>
+          <a:off x="0" y="0"/>
+          <a:ext cx="0" cy="0"/>
+          <a:chOff x="0" y="0"/>
+          <a:chExt cx="0" cy="0"/>
+        </a:xfrm>
+      </p:grpSpPr>
+      <p:sp>
+        <p:nvSpPr>
+          <p:cNvPr id="3" name="TextBox 2">
+            <a:extLst>
+              <a:ext uri="{FF2B5EF4-FFF2-40B4-BE49-F238E27FC236}">
+                <a16:creationId xmlns:a16="http://schemas.microsoft.com/office/drawing/2014/main" id="{7D243043-890C-007A-1E7C-E7643D3845B1}"/>
+              </a:ext>
+            </a:extLst>
+          </p:cNvPr>
+          <p:cNvSpPr txBox="1"/>
+          <p:nvPr/>
+        </p:nvSpPr>
+        <p:spPr>
+          <a:xfrm>
+            <a:off x="217714" y="255046"/>
+            <a:ext cx="11756571" cy="355354"/>
+          </a:xfrm>
+          <a:prstGeom prst="rect">
+            <a:avLst/>
+          </a:prstGeom>
+          <a:noFill/>
+        </p:spPr>
+        <p:txBody>
+          <a:bodyPr wrap="square">
+            <a:spAutoFit/>
+          </a:bodyPr>
+          <a:lstStyle/>
+          <a:p>
+            <a:pPr>
+              <a:lnSpc>
+                <a:spcPct val="150000"/>
+              </a:lnSpc>
+              <a:buNone/>
+            </a:pPr>
+            <a:r>
+              <a:rPr kumimoji="0" lang="en-US" altLang="en-US" sz="1300" b="0" i="0" u="none" strike="noStrike" cap="none" normalizeH="0" baseline="0">
+                <a:ln>
+                  <a:noFill/>
+                </a:ln>
+                <a:solidFill>
+                  <a:schemeClr val="tx1"/>
+                </a:solidFill>
+                <a:effectLst/>
+                <a:latin typeface="Arial" panose="020B0604020202020204" pitchFamily="34" charset="0"/>
+              </a:rPr>
+              <a:t>.</a:t>
+            </a:r>
+          </a:p>
+        </p:txBody>
+      </p:sp>
+    </p:spTree>
+    <p:extLst>
+      <p:ext uri="{BB962C8B-B14F-4D97-AF65-F5344CB8AC3E}">
+        <p14:creationId xmlns:p14="http://schemas.microsoft.com/office/powerpoint/2010/main" val="1022371357"/>
+      </p:ext>
+    </p:extLst>
+  </p:cSld>
+  <p:clrMapOvr>
+    <a:masterClrMapping/>
+  </p:clrMapOvr>
+</p:sld>
+</file>
+
+<file path=ppt/slides/slide8.xml><?xml version="1.0" encoding="utf-8"?>
+<p:sld xmlns:a="http://schemas.openxmlformats.org/drawingml/2006/main" xmlns:r="http://schemas.openxmlformats.org/officeDocument/2006/relationships" xmlns:p="http://schemas.openxmlformats.org/presentationml/2006/main">
+  <p:cSld>
+    <p:spTree>
+      <p:nvGrpSpPr>
+        <p:cNvPr id="1" name="">
+          <a:extLst>
+            <a:ext uri="{FF2B5EF4-FFF2-40B4-BE49-F238E27FC236}">
+              <a16:creationId xmlns:a16="http://schemas.microsoft.com/office/drawing/2014/main" id="{0E489652-8B6A-7E23-7DAA-31926A1CBEF2}"/>
+            </a:ext>
+          </a:extLst>
+        </p:cNvPr>
+        <p:cNvGrpSpPr/>
+        <p:nvPr/>
+      </p:nvGrpSpPr>
+      <p:grpSpPr>
+        <a:xfrm>
+          <a:off x="0" y="0"/>
+          <a:ext cx="0" cy="0"/>
+          <a:chOff x="0" y="0"/>
+          <a:chExt cx="0" cy="0"/>
+        </a:xfrm>
+      </p:grpSpPr>
+      <p:sp>
+        <p:nvSpPr>
+          <p:cNvPr id="3" name="TextBox 2">
+            <a:extLst>
+              <a:ext uri="{FF2B5EF4-FFF2-40B4-BE49-F238E27FC236}">
+                <a16:creationId xmlns:a16="http://schemas.microsoft.com/office/drawing/2014/main" id="{05CCAEFF-59FB-385C-2E0F-0819CCED9853}"/>
+              </a:ext>
+            </a:extLst>
+          </p:cNvPr>
+          <p:cNvSpPr txBox="1"/>
+          <p:nvPr/>
+        </p:nvSpPr>
+        <p:spPr>
+          <a:xfrm>
+            <a:off x="217714" y="255046"/>
+            <a:ext cx="11756571" cy="355354"/>
+          </a:xfrm>
+          <a:prstGeom prst="rect">
+            <a:avLst/>
+          </a:prstGeom>
+          <a:noFill/>
+        </p:spPr>
+        <p:txBody>
+          <a:bodyPr wrap="square">
+            <a:spAutoFit/>
+          </a:bodyPr>
+          <a:lstStyle/>
+          <a:p>
+            <a:pPr>
+              <a:lnSpc>
+                <a:spcPct val="150000"/>
+              </a:lnSpc>
+              <a:buNone/>
+            </a:pPr>
+            <a:r>
+              <a:rPr kumimoji="0" lang="en-US" altLang="en-US" sz="1300" b="0" i="0" u="none" strike="noStrike" cap="none" normalizeH="0" baseline="0">
+                <a:ln>
+                  <a:noFill/>
+                </a:ln>
+                <a:solidFill>
+                  <a:schemeClr val="tx1"/>
+                </a:solidFill>
+                <a:effectLst/>
+                <a:latin typeface="Arial" panose="020B0604020202020204" pitchFamily="34" charset="0"/>
+              </a:rPr>
+              <a:t>.</a:t>
+            </a:r>
+          </a:p>
+        </p:txBody>
+      </p:sp>
+    </p:spTree>
+    <p:extLst>
+      <p:ext uri="{BB962C8B-B14F-4D97-AF65-F5344CB8AC3E}">
+        <p14:creationId xmlns:p14="http://schemas.microsoft.com/office/powerpoint/2010/main" val="1075297670"/>
+      </p:ext>
+    </p:extLst>
+  </p:cSld>
+  <p:clrMapOvr>
+    <a:masterClrMapping/>
+  </p:clrMapOvr>
+</p:sld>
+</file>
+
+<file path=ppt/slides/slide9.xml><?xml version="1.0" encoding="utf-8"?>
+<p:sld xmlns:a="http://schemas.openxmlformats.org/drawingml/2006/main" xmlns:r="http://schemas.openxmlformats.org/officeDocument/2006/relationships" xmlns:p="http://schemas.openxmlformats.org/presentationml/2006/main">
+  <p:cSld>
+    <p:spTree>
+      <p:nvGrpSpPr>
+        <p:cNvPr id="1" name="">
+          <a:extLst>
+            <a:ext uri="{FF2B5EF4-FFF2-40B4-BE49-F238E27FC236}">
+              <a16:creationId xmlns:a16="http://schemas.microsoft.com/office/drawing/2014/main" id="{98A12F89-224B-0EEF-2F96-15F9ACAFD852}"/>
+            </a:ext>
+          </a:extLst>
+        </p:cNvPr>
+        <p:cNvGrpSpPr/>
+        <p:nvPr/>
+      </p:nvGrpSpPr>
+      <p:grpSpPr>
+        <a:xfrm>
+          <a:off x="0" y="0"/>
+          <a:ext cx="0" cy="0"/>
+          <a:chOff x="0" y="0"/>
+          <a:chExt cx="0" cy="0"/>
+        </a:xfrm>
+      </p:grpSpPr>
+      <p:sp>
+        <p:nvSpPr>
+          <p:cNvPr id="3" name="TextBox 2">
+            <a:extLst>
+              <a:ext uri="{FF2B5EF4-FFF2-40B4-BE49-F238E27FC236}">
+                <a16:creationId xmlns:a16="http://schemas.microsoft.com/office/drawing/2014/main" id="{F9C797D4-77C2-8BE5-BC0D-0A7041505372}"/>
+              </a:ext>
+            </a:extLst>
+          </p:cNvPr>
+          <p:cNvSpPr txBox="1"/>
+          <p:nvPr/>
+        </p:nvSpPr>
+        <p:spPr>
+          <a:xfrm>
+            <a:off x="217714" y="255046"/>
+            <a:ext cx="11756571" cy="355354"/>
+          </a:xfrm>
+          <a:prstGeom prst="rect">
+            <a:avLst/>
+          </a:prstGeom>
+          <a:noFill/>
+        </p:spPr>
+        <p:txBody>
+          <a:bodyPr wrap="square">
+            <a:spAutoFit/>
+          </a:bodyPr>
+          <a:lstStyle/>
+          <a:p>
+            <a:pPr>
+              <a:lnSpc>
+                <a:spcPct val="150000"/>
+              </a:lnSpc>
+              <a:buNone/>
+            </a:pPr>
+            <a:r>
+              <a:rPr kumimoji="0" lang="en-US" altLang="en-US" sz="1300" b="0" i="0" u="none" strike="noStrike" cap="none" normalizeH="0" baseline="0">
+                <a:ln>
+                  <a:noFill/>
+                </a:ln>
+                <a:solidFill>
+                  <a:schemeClr val="tx1"/>
+                </a:solidFill>
+                <a:effectLst/>
+                <a:latin typeface="Arial" panose="020B0604020202020204" pitchFamily="34" charset="0"/>
+              </a:rPr>
+              <a:t>.</a:t>
+            </a:r>
+          </a:p>
+        </p:txBody>
+      </p:sp>
+    </p:spTree>
+    <p:extLst>
+      <p:ext uri="{BB962C8B-B14F-4D97-AF65-F5344CB8AC3E}">
+        <p14:creationId xmlns:p14="http://schemas.microsoft.com/office/powerpoint/2010/main" val="464798701"/>
       </p:ext>
     </p:extLst>
   </p:cSld>
